--- a/pro_sanzhutraining/docs/项目建设方案.pptx
+++ b/pro_sanzhutraining/docs/项目建设方案.pptx
@@ -23749,8 +23749,8 @@
         </p:nvSpPr>
         <p:spPr>
           <a:xfrm>
-            <a:off x="762000" y="1651000"/>
-            <a:ext cx="10230485" cy="4008755"/>
+            <a:off x="762000" y="1383030"/>
+            <a:ext cx="10414000" cy="4276725"/>
           </a:xfrm>
           <a:prstGeom prst="roundRect">
             <a:avLst>
@@ -31525,7 +31525,7 @@
         <p:spPr>
           <a:xfrm>
             <a:off x="762000" y="1651000"/>
-            <a:ext cx="10668000" cy="3668395"/>
+            <a:ext cx="10668000" cy="4034790"/>
           </a:xfrm>
           <a:prstGeom prst="roundRect">
             <a:avLst>
@@ -31566,8 +31566,8 @@
         </p:nvSpPr>
         <p:spPr>
           <a:xfrm>
-            <a:off x="762000" y="5547360"/>
-            <a:ext cx="10668000" cy="1206500"/>
+            <a:off x="762000" y="5868670"/>
+            <a:ext cx="10668000" cy="880745"/>
           </a:xfrm>
           <a:prstGeom prst="roundRect">
             <a:avLst>
@@ -31603,7 +31603,7 @@
         </p:nvSpPr>
         <p:spPr>
           <a:xfrm>
-            <a:off x="1016000" y="5648960"/>
+            <a:off x="1016000" y="5813425"/>
             <a:ext cx="10160000" cy="1016000"/>
           </a:xfrm>
           <a:prstGeom prst="rect">
@@ -35778,7 +35778,7 @@
         <p:spPr>
           <a:xfrm>
             <a:off x="762000" y="1651000"/>
-            <a:ext cx="10668000" cy="3302000"/>
+            <a:ext cx="10668000" cy="3733800"/>
           </a:xfrm>
           <a:prstGeom prst="roundRect">
             <a:avLst>
@@ -35819,7 +35819,7 @@
         </p:nvSpPr>
         <p:spPr>
           <a:xfrm>
-            <a:off x="762000" y="5207000"/>
+            <a:off x="762000" y="5537200"/>
             <a:ext cx="10668000" cy="1143000"/>
           </a:xfrm>
           <a:prstGeom prst="roundRect">
@@ -35856,7 +35856,7 @@
         </p:nvSpPr>
         <p:spPr>
           <a:xfrm>
-            <a:off x="1016000" y="5308600"/>
+            <a:off x="1016000" y="5638800"/>
             <a:ext cx="10160000" cy="939800"/>
           </a:xfrm>
           <a:prstGeom prst="rect">
@@ -37214,7 +37214,7 @@
         <p:spPr>
           <a:xfrm>
             <a:off x="762000" y="1651000"/>
-            <a:ext cx="6477000" cy="3048000"/>
+            <a:ext cx="6800850" cy="3263265"/>
           </a:xfrm>
           <a:prstGeom prst="roundRect">
             <a:avLst>
@@ -50880,7 +50880,7 @@
         <p:spPr>
           <a:xfrm>
             <a:off x="762000" y="1651000"/>
-            <a:ext cx="10668000" cy="3302000"/>
+            <a:ext cx="10668000" cy="3822700"/>
           </a:xfrm>
           <a:prstGeom prst="roundRect">
             <a:avLst>
@@ -50968,8 +50968,8 @@
         </p:nvSpPr>
         <p:spPr>
           <a:xfrm>
-            <a:off x="762000" y="5270500"/>
-            <a:ext cx="50800" cy="1079500"/>
+            <a:off x="762000" y="5983605"/>
+            <a:ext cx="76200" cy="457835"/>
           </a:xfrm>
           <a:prstGeom prst="roundRect">
             <a:avLst>
@@ -51005,8 +51005,8 @@
         </p:nvSpPr>
         <p:spPr>
           <a:xfrm>
-            <a:off x="1016000" y="5334000"/>
-            <a:ext cx="10160000" cy="952500"/>
+            <a:off x="1016000" y="5709920"/>
+            <a:ext cx="10380345" cy="952500"/>
           </a:xfrm>
           <a:prstGeom prst="rect">
             <a:avLst/>

--- a/pro_sanzhutraining/docs/项目建设方案.pptx
+++ b/pro_sanzhutraining/docs/项目建设方案.pptx
@@ -280,12 +280,12 @@
   <p:extLst>
     <p:ext uri="{EFAFB233-063F-42B5-8137-9DF3F51BA10A}">
       <p15:sldGuideLst xmlns:p15="http://schemas.microsoft.com/office/powerpoint/2012/main">
-        <p15:guide id="1" orient="horz" pos="1580" userDrawn="1">
+        <p15:guide id="1" orient="horz" pos="1520" userDrawn="1">
           <p15:clr>
             <a:srgbClr val="747775"/>
           </p15:clr>
         </p15:guide>
-        <p15:guide id="2" pos="2816" userDrawn="1">
+        <p15:guide id="2" pos="2856" userDrawn="1">
           <p15:clr>
             <a:srgbClr val="747775"/>
           </p15:clr>
@@ -41869,7 +41869,7 @@
                 <a:cs typeface="Noto Sans SC" panose="020B0200000000000000" charset="-122"/>
                 <a:sym typeface="Noto Sans SC" panose="020B0200000000000000" charset="-122"/>
               </a:rPr>
-              <a:t>五、</a:t>
+              <a:t>五、项目</a:t>
             </a:r>
             <a:r>
               <a:rPr lang="en-US" sz="3200" b="1" i="0" u="none" strike="noStrike">
@@ -41881,7 +41881,7 @@
                 <a:cs typeface="Noto Sans SC" panose="020B0200000000000000" charset="-122"/>
                 <a:sym typeface="Noto Sans SC" panose="020B0200000000000000" charset="-122"/>
               </a:rPr>
-              <a:t>产品路线图：持续迭代，引领行业</a:t>
+              <a:t>路线图：持续迭代，引领行业</a:t>
             </a:r>
             <a:endParaRPr lang="en-US" sz="1100"/>
           </a:p>
@@ -45140,7 +45140,7 @@
                 <a:cs typeface="Noto Sans SC" panose="020B0200000000000000" charset="-122"/>
                 <a:sym typeface="Noto Sans SC" panose="020B0200000000000000" charset="-122"/>
               </a:rPr>
-              <a:t>七、</a:t>
+              <a:t>七、服务内容</a:t>
             </a:r>
             <a:r>
               <a:rPr lang="en-US" sz="3200" b="1" i="0" u="none" strike="noStrike">
@@ -45152,7 +45152,7 @@
                 <a:cs typeface="Noto Sans SC" panose="020B0200000000000000" charset="-122"/>
                 <a:sym typeface="Noto Sans SC" panose="020B0200000000000000" charset="-122"/>
               </a:rPr>
-              <a:t>产品功能报价方案</a:t>
+              <a:t>报价</a:t>
             </a:r>
             <a:endParaRPr lang="en-US" sz="1100"/>
           </a:p>
@@ -45348,7 +45348,7 @@
                 <a:cs typeface="Noto Sans SC" panose="020B0200000000000000" charset="-122"/>
                 <a:sym typeface="Noto Sans SC" panose="020B0200000000000000" charset="-122"/>
               </a:rPr>
-              <a:t>¥75,000 ~ ¥88,000</a:t>
+              <a:t>¥75000 ~ ¥98000</a:t>
             </a:r>
             <a:endParaRPr lang="en-US" sz="1100"/>
           </a:p>
@@ -45516,7 +45516,7 @@
                 <a:cs typeface="Noto Sans SC" panose="020B0200000000000000" charset="-122"/>
                 <a:sym typeface="Noto Sans SC" panose="020B0200000000000000" charset="-122"/>
               </a:rPr>
-              <a:t>¥3,500</a:t>
+              <a:t>¥4,000</a:t>
             </a:r>
             <a:endParaRPr lang="en-US" sz="1100"/>
           </a:p>
@@ -45731,7 +45731,7 @@
                 <a:cs typeface="Noto Sans SC" panose="020B0200000000000000" charset="-122"/>
                 <a:sym typeface="Noto Sans SC" panose="020B0200000000000000" charset="-122"/>
               </a:rPr>
-              <a:t>¥7,500</a:t>
+              <a:t>¥9,000</a:t>
             </a:r>
             <a:endParaRPr lang="en-US" sz="1100"/>
           </a:p>
@@ -45978,7 +45978,7 @@
                 <a:cs typeface="Noto Sans SC" panose="020B0200000000000000" charset="-122"/>
                 <a:sym typeface="Noto Sans SC" panose="020B0200000000000000" charset="-122"/>
               </a:rPr>
-              <a:t>¥24,800</a:t>
+              <a:t>¥26,500</a:t>
             </a:r>
             <a:endParaRPr lang="en-US" sz="1100"/>
           </a:p>
@@ -46193,7 +46193,7 @@
                 <a:cs typeface="Noto Sans SC" panose="020B0200000000000000" charset="-122"/>
                 <a:sym typeface="Noto Sans SC" panose="020B0200000000000000" charset="-122"/>
               </a:rPr>
-              <a:t>¥39,200</a:t>
+              <a:t>¥30,000</a:t>
             </a:r>
             <a:endParaRPr lang="en-US" sz="1100"/>
           </a:p>
@@ -46408,7 +46408,7 @@
                 <a:cs typeface="Noto Sans SC" panose="020B0200000000000000" charset="-122"/>
                 <a:sym typeface="Noto Sans SC" panose="020B0200000000000000" charset="-122"/>
               </a:rPr>
-              <a:t>¥13,000</a:t>
+              <a:t>¥10,000</a:t>
             </a:r>
             <a:endParaRPr lang="en-US" sz="1100"/>
           </a:p>
